--- a/print/banner.pptx
+++ b/print/banner.pptx
@@ -508,7 +508,7 @@
           <a:p/>
           <a:p>
             <a:r>
-              <a:t>The QR code points at oberrieden.pub/review, which redirects to the pub's Google listing. If that Google link ever changes, the redirect is what changes - this code stays valid, so printed copies keep working.</a:t>
+              <a:t>The left code points at oberrieden.pub/review, which redirects to the pub's Google listing; the right one at oberrieden.pub/instagram. If either link ever changes, the redirect is what changes - the codes stay valid, so printed copies keep working.</a:t>
             </a:r>
           </a:p>
           <a:p/>
@@ -3658,7 +3658,7 @@
         <p:spPr>
           <a:xfrm>
             <a:off x="792000" y="1152000"/>
-            <a:ext cx="7092000" cy="720000"/>
+            <a:ext cx="5652000" cy="720000"/>
           </a:xfrm>
           <a:prstGeom prst="rect">
             <a:avLst/>
@@ -3693,7 +3693,7 @@
         <p:spPr>
           <a:xfrm>
             <a:off x="792000" y="1926000"/>
-            <a:ext cx="7092000" cy="288000"/>
+            <a:ext cx="5652000" cy="288000"/>
           </a:xfrm>
           <a:prstGeom prst="rect">
             <a:avLst/>
@@ -3728,7 +3728,7 @@
         <p:spPr>
           <a:xfrm>
             <a:off x="792000" y="2268000"/>
-            <a:ext cx="7092000" cy="252000"/>
+            <a:ext cx="5652000" cy="468000"/>
           </a:xfrm>
           <a:prstGeom prst="rect">
             <a:avLst/>
@@ -3749,7 +3749,17 @@
                 </a:solidFill>
                 <a:latin typeface="Calibri"/>
               </a:rPr>
-              <a:t>Hat es Ihnen gefallen? Sagen Sie es Google. Wenn nicht, dem Wirt.</a:t>
+              <a:t>Hat es Ihnen gefallen? Sagen Sie es Google.</a:t>
+            </a:r>
+            <a:br/>
+            <a:r>
+              <a:rPr sz="1400" b="0">
+                <a:solidFill>
+                  <a:srgbClr val="531C23"/>
+                </a:solidFill>
+                <a:latin typeface="Calibri"/>
+              </a:rPr>
+              <a:t>Wenn nicht, dem Wirt.</a:t>
             </a:r>
           </a:p>
         </p:txBody>
@@ -3770,8 +3780,8 @@
         </p:blipFill>
         <p:spPr>
           <a:xfrm>
-            <a:off x="8100000" y="1134000"/>
-            <a:ext cx="1800000" cy="1800000"/>
+            <a:off x="6660000" y="1188000"/>
+            <a:ext cx="1512000" cy="1512000"/>
           </a:xfrm>
           <a:prstGeom prst="rect">
             <a:avLst/>
@@ -3786,8 +3796,8 @@
         </p:nvSpPr>
         <p:spPr>
           <a:xfrm>
-            <a:off x="7812000" y="2988000"/>
-            <a:ext cx="2376000" cy="216000"/>
+            <a:off x="6552000" y="2772000"/>
+            <a:ext cx="1728000" cy="216000"/>
           </a:xfrm>
           <a:prstGeom prst="rect">
             <a:avLst/>
@@ -3813,9 +3823,68 @@
           </a:p>
         </p:txBody>
       </p:sp>
-      <p:sp>
-        <p:nvSpPr>
-          <p:cNvPr id="10" name="Rectangle 9"/>
+      <p:pic>
+        <p:nvPicPr>
+          <p:cNvPr id="10" name="Picture 9" descr="qr-instagram.png"/>
+          <p:cNvPicPr>
+            <a:picLocks noChangeAspect="1"/>
+          </p:cNvPicPr>
+          <p:nvPr/>
+        </p:nvPicPr>
+        <p:blipFill>
+          <a:blip r:embed="rId3"/>
+          <a:stretch>
+            <a:fillRect/>
+          </a:stretch>
+        </p:blipFill>
+        <p:spPr>
+          <a:xfrm>
+            <a:off x="8388000" y="1188000"/>
+            <a:ext cx="1512000" cy="1512000"/>
+          </a:xfrm>
+          <a:prstGeom prst="rect">
+            <a:avLst/>
+          </a:prstGeom>
+        </p:spPr>
+      </p:pic>
+      <p:sp>
+        <p:nvSpPr>
+          <p:cNvPr id="11" name="TextBox 10"/>
+          <p:cNvSpPr txBox="1"/>
+          <p:nvPr/>
+        </p:nvSpPr>
+        <p:spPr>
+          <a:xfrm>
+            <a:off x="8280000" y="2772000"/>
+            <a:ext cx="1728000" cy="216000"/>
+          </a:xfrm>
+          <a:prstGeom prst="rect">
+            <a:avLst/>
+          </a:prstGeom>
+          <a:noFill/>
+        </p:spPr>
+        <p:txBody>
+          <a:bodyPr wrap="square" anchor="t" lIns="0" rIns="0" tIns="0" bIns="0">
+            <a:spAutoFit/>
+          </a:bodyPr>
+          <a:lstStyle/>
+          <a:p>
+            <a:pPr algn="ctr"/>
+            <a:r>
+              <a:rPr sz="1000" b="1" spc="150">
+                <a:solidFill>
+                  <a:srgbClr val="531C23"/>
+                </a:solidFill>
+                <a:latin typeface="Trebuchet MS"/>
+              </a:rPr>
+              <a:t>FOLGEN SIE UNS</a:t>
+            </a:r>
+          </a:p>
+        </p:txBody>
+      </p:sp>
+      <p:sp>
+        <p:nvSpPr>
+          <p:cNvPr id="12" name="Rectangle 11"/>
           <p:cNvSpPr/>
           <p:nvPr/>
         </p:nvSpPr>
@@ -3859,7 +3928,7 @@
       </p:sp>
       <p:sp>
         <p:nvSpPr>
-          <p:cNvPr id="11" name="Rectangle 10"/>
+          <p:cNvPr id="13" name="Rectangle 12"/>
           <p:cNvSpPr/>
           <p:nvPr/>
         </p:nvSpPr>
@@ -3901,7 +3970,7 @@
       </p:sp>
       <p:sp>
         <p:nvSpPr>
-          <p:cNvPr id="12" name="TextBox 11"/>
+          <p:cNvPr id="14" name="TextBox 13"/>
           <p:cNvSpPr txBox="1"/>
           <p:nvPr/>
         </p:nvSpPr>
@@ -3936,14 +4005,14 @@
       </p:sp>
       <p:sp>
         <p:nvSpPr>
-          <p:cNvPr id="13" name="TextBox 12"/>
+          <p:cNvPr id="15" name="TextBox 14"/>
           <p:cNvSpPr txBox="1"/>
           <p:nvPr/>
         </p:nvSpPr>
         <p:spPr>
           <a:xfrm>
             <a:off x="792000" y="4824000"/>
-            <a:ext cx="7092000" cy="720000"/>
+            <a:ext cx="5652000" cy="720000"/>
           </a:xfrm>
           <a:prstGeom prst="rect">
             <a:avLst/>
@@ -3971,14 +4040,14 @@
       </p:sp>
       <p:sp>
         <p:nvSpPr>
-          <p:cNvPr id="14" name="TextBox 13"/>
+          <p:cNvPr id="16" name="TextBox 15"/>
           <p:cNvSpPr txBox="1"/>
           <p:nvPr/>
         </p:nvSpPr>
         <p:spPr>
           <a:xfrm>
             <a:off x="792000" y="5598000"/>
-            <a:ext cx="7092000" cy="288000"/>
+            <a:ext cx="5652000" cy="288000"/>
           </a:xfrm>
           <a:prstGeom prst="rect">
             <a:avLst/>
@@ -4006,14 +4075,14 @@
       </p:sp>
       <p:sp>
         <p:nvSpPr>
-          <p:cNvPr id="15" name="TextBox 14"/>
+          <p:cNvPr id="17" name="TextBox 16"/>
           <p:cNvSpPr txBox="1"/>
           <p:nvPr/>
         </p:nvSpPr>
         <p:spPr>
           <a:xfrm>
             <a:off x="792000" y="5940000"/>
-            <a:ext cx="7092000" cy="252000"/>
+            <a:ext cx="5652000" cy="468000"/>
           </a:xfrm>
           <a:prstGeom prst="rect">
             <a:avLst/>
@@ -4034,14 +4103,24 @@
                 </a:solidFill>
                 <a:latin typeface="Calibri"/>
               </a:rPr>
-              <a:t>Enjoyed it? Tell Google. If not, tell the landlord.</a:t>
+              <a:t>Enjoyed it? Tell Google.</a:t>
+            </a:r>
+            <a:br/>
+            <a:r>
+              <a:rPr sz="1400" b="0">
+                <a:solidFill>
+                  <a:srgbClr val="531C23"/>
+                </a:solidFill>
+                <a:latin typeface="Calibri"/>
+              </a:rPr>
+              <a:t>If not, tell the landlord.</a:t>
             </a:r>
           </a:p>
         </p:txBody>
       </p:sp>
       <p:pic>
         <p:nvPicPr>
-          <p:cNvPr id="16" name="Picture 15" descr="qr-review.png"/>
+          <p:cNvPr id="18" name="Picture 17" descr="qr-review.png"/>
           <p:cNvPicPr>
             <a:picLocks noChangeAspect="1"/>
           </p:cNvPicPr>
@@ -4055,8 +4134,8 @@
         </p:blipFill>
         <p:spPr>
           <a:xfrm>
-            <a:off x="8100000" y="4806000"/>
-            <a:ext cx="1800000" cy="1800000"/>
+            <a:off x="6660000" y="4860000"/>
+            <a:ext cx="1512000" cy="1512000"/>
           </a:xfrm>
           <a:prstGeom prst="rect">
             <a:avLst/>
@@ -4065,14 +4144,14 @@
       </p:pic>
       <p:sp>
         <p:nvSpPr>
-          <p:cNvPr id="17" name="TextBox 16"/>
+          <p:cNvPr id="19" name="TextBox 18"/>
           <p:cNvSpPr txBox="1"/>
           <p:nvPr/>
         </p:nvSpPr>
         <p:spPr>
           <a:xfrm>
-            <a:off x="7812000" y="6660000"/>
-            <a:ext cx="2376000" cy="216000"/>
+            <a:off x="6552000" y="6444000"/>
+            <a:ext cx="1728000" cy="216000"/>
           </a:xfrm>
           <a:prstGeom prst="rect">
             <a:avLst/>
@@ -4098,9 +4177,68 @@
           </a:p>
         </p:txBody>
       </p:sp>
+      <p:pic>
+        <p:nvPicPr>
+          <p:cNvPr id="20" name="Picture 19" descr="qr-instagram.png"/>
+          <p:cNvPicPr>
+            <a:picLocks noChangeAspect="1"/>
+          </p:cNvPicPr>
+          <p:nvPr/>
+        </p:nvPicPr>
+        <p:blipFill>
+          <a:blip r:embed="rId3"/>
+          <a:stretch>
+            <a:fillRect/>
+          </a:stretch>
+        </p:blipFill>
+        <p:spPr>
+          <a:xfrm>
+            <a:off x="8388000" y="4860000"/>
+            <a:ext cx="1512000" cy="1512000"/>
+          </a:xfrm>
+          <a:prstGeom prst="rect">
+            <a:avLst/>
+          </a:prstGeom>
+        </p:spPr>
+      </p:pic>
+      <p:sp>
+        <p:nvSpPr>
+          <p:cNvPr id="21" name="TextBox 20"/>
+          <p:cNvSpPr txBox="1"/>
+          <p:nvPr/>
+        </p:nvSpPr>
+        <p:spPr>
+          <a:xfrm>
+            <a:off x="8280000" y="6444000"/>
+            <a:ext cx="1728000" cy="216000"/>
+          </a:xfrm>
+          <a:prstGeom prst="rect">
+            <a:avLst/>
+          </a:prstGeom>
+          <a:noFill/>
+        </p:spPr>
+        <p:txBody>
+          <a:bodyPr wrap="square" anchor="t" lIns="0" rIns="0" tIns="0" bIns="0">
+            <a:spAutoFit/>
+          </a:bodyPr>
+          <a:lstStyle/>
+          <a:p>
+            <a:pPr algn="ctr"/>
+            <a:r>
+              <a:rPr sz="1000" b="1" spc="150">
+                <a:solidFill>
+                  <a:srgbClr val="531C23"/>
+                </a:solidFill>
+                <a:latin typeface="Trebuchet MS"/>
+              </a:rPr>
+              <a:t>FOLLOW US</a:t>
+            </a:r>
+          </a:p>
+        </p:txBody>
+      </p:sp>
       <p:cxnSp>
         <p:nvCxnSpPr>
-          <p:cNvPr id="18" name="Connector 17"/>
+          <p:cNvPr id="22" name="Connector 21"/>
           <p:cNvCxnSpPr/>
           <p:nvPr/>
         </p:nvCxnSpPr>
